--- a/diapositivas/reserva1_comunidad.pptx
+++ b/diapositivas/reserva1_comunidad.pptx
@@ -8822,7 +8822,7 @@
                   <a:schemeClr val="bg1"/>
                 </a:solidFill>
               </a:rPr>
-              <a:t>Qué necesitamos</a:t>
+              <a:t>Recursos</a:t>
             </a:r>
             <a:endParaRPr lang="en-US" sz="1700" dirty="0"/>
           </a:p>
@@ -8907,7 +8907,7 @@
                   <a:schemeClr val="bg1"/>
                 </a:solidFill>
               </a:rPr>
-              <a:t>Principal riesgo</a:t>
+              <a:t>Riesgos</a:t>
             </a:r>
             <a:endParaRPr lang="en-US" sz="1700" dirty="0"/>
           </a:p>
